--- a/lectures/lecture01.pptx
+++ b/lectures/lecture01.pptx
@@ -6422,7 +6422,7 @@
                 </a:solidFill>
                 <a:latin typeface="Arial"/>
               </a:rPr>
-              <a:t>T — классификация писем · E — размеченный архив писем · P — доля верных ответов</a:t>
+              <a:t>T — классификация писем · E — размеченный архив писем · P — accuracy</a:t>
             </a:r>
           </a:p>
         </p:txBody>

--- a/lectures/lecture01.pptx
+++ b/lectures/lecture01.pptx
@@ -3244,7 +3244,7 @@
                 </a:solidFill>
                 <a:latin typeface="Arial"/>
               </a:rPr>
-              <a:t>Что такое машинное обучение и как выглядит ML-проект</a:t>
+              <a:t>Что такое машинное обучение и как выглядит ML-проект?</a:t>
             </a:r>
           </a:p>
         </p:txBody>
@@ -6549,7 +6549,7 @@
                 </a:solidFill>
                 <a:latin typeface="Arial"/>
               </a:rPr>
-              <a:t>Как это выглядит на практике</a:t>
+              <a:t>Как это выглядит на практике?</a:t>
             </a:r>
           </a:p>
         </p:txBody>
@@ -6769,7 +6769,7 @@
                 </a:solidFill>
                 <a:latin typeface="Arial"/>
               </a:rPr>
-              <a:t>Где это уже работает</a:t>
+              <a:t>Где это уже работает?</a:t>
             </a:r>
           </a:p>
         </p:txBody>
@@ -10622,7 +10622,7 @@
                 </a:solidFill>
                 <a:latin typeface="Arial"/>
               </a:rPr>
-              <a:t>Как устроена задача</a:t>
+              <a:t>Как устроена задача?</a:t>
             </a:r>
           </a:p>
         </p:txBody>
@@ -11428,7 +11428,7 @@
                 </a:solidFill>
                 <a:latin typeface="Arial"/>
               </a:rPr>
-              <a:t>Как выглядит выборка на самом деле</a:t>
+              <a:t>Как выглядит выборка на самом деле?</a:t>
             </a:r>
           </a:p>
         </p:txBody>
@@ -13446,7 +13446,7 @@
                 </a:solidFill>
                 <a:latin typeface="Arial"/>
               </a:rPr>
-              <a:t>Как не обмануть самого себя</a:t>
+              <a:t>Как не обмануть самого себя?</a:t>
             </a:r>
           </a:p>
         </p:txBody>
@@ -18750,7 +18750,7 @@
                 </a:solidFill>
                 <a:latin typeface="Arial"/>
               </a:rPr>
-              <a:t>Чем заканчивается утечка</a:t>
+              <a:t>Чем заканчивается утечка?</a:t>
             </a:r>
           </a:p>
         </p:txBody>
@@ -19597,7 +19597,7 @@
                 </a:solidFill>
                 <a:latin typeface="Arial"/>
               </a:rPr>
-              <a:t>Как от этого защищаться</a:t>
+              <a:t>Как от этого защищаться?</a:t>
             </a:r>
           </a:p>
         </p:txBody>
@@ -20104,7 +20104,7 @@
                 </a:solidFill>
                 <a:latin typeface="Arial"/>
               </a:rPr>
-              <a:t>Как подходить к задаче</a:t>
+              <a:t>Как подходить к задаче?</a:t>
             </a:r>
           </a:p>
         </p:txBody>
@@ -24856,7 +24856,7 @@
                 </a:solidFill>
                 <a:latin typeface="Arial"/>
               </a:rPr>
-              <a:t>Что нужно унести с этой лекции</a:t>
+              <a:t>Что нужно унести с этой лекции?</a:t>
             </a:r>
           </a:p>
         </p:txBody>
@@ -25189,7 +25189,7 @@
                 </a:solidFill>
                 <a:latin typeface="Arial"/>
               </a:rPr>
-              <a:t>Как устроено оценивание</a:t>
+              <a:t>Как устроено оценивание?</a:t>
             </a:r>
           </a:p>
         </p:txBody>
@@ -25777,7 +25777,7 @@
                 </a:solidFill>
                 <a:latin typeface="Arial"/>
               </a:rPr>
-              <a:t>Что делать дальше</a:t>
+              <a:t>Что делать дальше?</a:t>
             </a:r>
           </a:p>
         </p:txBody>
@@ -26218,7 +26218,7 @@
                 </a:solidFill>
                 <a:latin typeface="Arial"/>
               </a:rPr>
-              <a:t>Чем будем пользоваться</a:t>
+              <a:t>Чем будем пользоваться?</a:t>
             </a:r>
           </a:p>
         </p:txBody>
@@ -27041,7 +27041,7 @@
                 </a:solidFill>
                 <a:latin typeface="Arial"/>
               </a:rPr>
-              <a:t>Что такое машинное обучение</a:t>
+              <a:t>Что такое машинное обучение?</a:t>
             </a:r>
           </a:p>
         </p:txBody>

--- a/lectures/lecture01.pptx
+++ b/lectures/lecture01.pptx
@@ -3342,7 +3342,7 @@
           <a:p>
             <a:pPr algn="l"/>
             <a:r>
-              <a:rPr sz="1600" b="0" i="0">
+              <a:rPr sz="1700" b="0" i="0">
                 <a:solidFill>
                   <a:srgbClr val="181D27"/>
                 </a:solidFill>
@@ -3470,7 +3470,7 @@
             <a:r>
               <a:rPr sz="2000" b="0" i="0">
                 <a:solidFill>
-                  <a:srgbClr val="6B7484"/>
+                  <a:srgbClr val="181D27"/>
                 </a:solidFill>
                 <a:latin typeface="Arial"/>
               </a:rPr>
@@ -3537,7 +3537,7 @@
               <a:buChar char="—"/>
             </a:pPr>
             <a:r>
-              <a:rPr sz="1600" b="0" i="0">
+              <a:rPr sz="1700" b="0" i="0">
                 <a:solidFill>
                   <a:srgbClr val="181D27"/>
                 </a:solidFill>
@@ -3546,7 +3546,7 @@
               <a:t>Человек формулирует </a:t>
             </a:r>
             <a:r>
-              <a:rPr sz="1600" b="1" i="0">
+              <a:rPr sz="1700" b="1" i="0">
                 <a:solidFill>
                   <a:srgbClr val="181D27"/>
                 </a:solidFill>
@@ -3555,7 +3555,7 @@
               <a:t>правила</a:t>
             </a:r>
             <a:r>
-              <a:rPr sz="1600" b="0" i="0">
+              <a:rPr sz="1700" b="0" i="0">
                 <a:solidFill>
                   <a:srgbClr val="181D27"/>
                 </a:solidFill>
@@ -3579,7 +3579,7 @@
               <a:buChar char="—"/>
             </a:pPr>
             <a:r>
-              <a:rPr sz="1600" b="0" i="0">
+              <a:rPr sz="1700" b="0" i="0">
                 <a:solidFill>
                   <a:srgbClr val="181D27"/>
                 </a:solidFill>
@@ -3603,7 +3603,7 @@
               <a:buChar char="—"/>
             </a:pPr>
             <a:r>
-              <a:rPr sz="1600" b="0" i="0">
+              <a:rPr sz="1700" b="0" i="0">
                 <a:solidFill>
                   <a:srgbClr val="181D27"/>
                 </a:solidFill>
@@ -3627,7 +3627,7 @@
               <a:buChar char="—"/>
             </a:pPr>
             <a:r>
-              <a:rPr sz="1600" b="0" i="0">
+              <a:rPr sz="1700" b="0" i="0">
                 <a:solidFill>
                   <a:srgbClr val="181D27"/>
                 </a:solidFill>
@@ -3696,7 +3696,7 @@
               <a:buChar char="—"/>
             </a:pPr>
             <a:r>
-              <a:rPr sz="1600" b="0" i="0">
+              <a:rPr sz="1700" b="0" i="0">
                 <a:solidFill>
                   <a:srgbClr val="181D27"/>
                 </a:solidFill>
@@ -3705,7 +3705,7 @@
               <a:t>Человек даёт </a:t>
             </a:r>
             <a:r>
-              <a:rPr sz="1600" b="1" i="0">
+              <a:rPr sz="1700" b="1" i="0">
                 <a:solidFill>
                   <a:srgbClr val="181D27"/>
                 </a:solidFill>
@@ -3714,7 +3714,7 @@
               <a:t>данные и ответы</a:t>
             </a:r>
             <a:r>
-              <a:rPr sz="1600" b="0" i="0">
+              <a:rPr sz="1700" b="0" i="0">
                 <a:solidFill>
                   <a:srgbClr val="181D27"/>
                 </a:solidFill>
@@ -3738,7 +3738,7 @@
               <a:buChar char="—"/>
             </a:pPr>
             <a:r>
-              <a:rPr sz="1600" b="0" i="0">
+              <a:rPr sz="1700" b="0" i="0">
                 <a:solidFill>
                   <a:srgbClr val="181D27"/>
                 </a:solidFill>
@@ -3762,7 +3762,7 @@
               <a:buChar char="—"/>
             </a:pPr>
             <a:r>
-              <a:rPr sz="1600" b="0" i="0">
+              <a:rPr sz="1700" b="0" i="0">
                 <a:solidFill>
                   <a:srgbClr val="181D27"/>
                 </a:solidFill>
@@ -3786,7 +3786,7 @@
               <a:buChar char="—"/>
             </a:pPr>
             <a:r>
-              <a:rPr sz="1600" b="0" i="0">
+              <a:rPr sz="1700" b="0" i="0">
                 <a:solidFill>
                   <a:srgbClr val="181D27"/>
                 </a:solidFill>
@@ -3984,7 +3984,7 @@
             <a:r>
               <a:rPr sz="2000" b="0" i="0">
                 <a:solidFill>
-                  <a:srgbClr val="6B7484"/>
+                  <a:srgbClr val="181D27"/>
                 </a:solidFill>
                 <a:latin typeface="Arial"/>
               </a:rPr>
@@ -4227,9 +4227,9 @@
               </a:lnSpc>
             </a:pPr>
             <a:r>
-              <a:rPr sz="1700" b="0" i="0">
-                <a:solidFill>
-                  <a:srgbClr val="6B7484"/>
+              <a:rPr sz="1800" b="0" i="0">
+                <a:solidFill>
+                  <a:srgbClr val="181D27"/>
                 </a:solidFill>
                 <a:latin typeface="Arial"/>
               </a:rPr>
@@ -4474,7 +4474,7 @@
               </a:lnSpc>
             </a:pPr>
             <a:r>
-              <a:rPr sz="1600" b="0" i="0">
+              <a:rPr sz="1700" b="0" i="0">
                 <a:solidFill>
                   <a:srgbClr val="181D27"/>
                 </a:solidFill>
@@ -4509,7 +4509,7 @@
           <a:p>
             <a:pPr algn="l"/>
             <a:r>
-              <a:rPr sz="1600" b="1" i="0">
+              <a:rPr sz="1700" b="1" i="0">
                 <a:solidFill>
                   <a:srgbClr val="2B5CE6"/>
                 </a:solidFill>
@@ -4554,7 +4554,7 @@
               </a:lnSpc>
             </a:pPr>
             <a:r>
-              <a:rPr sz="1600" b="0" i="0">
+              <a:rPr sz="1700" b="0" i="0">
                 <a:solidFill>
                   <a:srgbClr val="181D27"/>
                 </a:solidFill>
@@ -4589,7 +4589,7 @@
           <a:p>
             <a:pPr algn="l"/>
             <a:r>
-              <a:rPr sz="1600" b="1" i="0">
+              <a:rPr sz="1700" b="1" i="0">
                 <a:solidFill>
                   <a:srgbClr val="2B5CE6"/>
                 </a:solidFill>
@@ -4634,7 +4634,7 @@
               </a:lnSpc>
             </a:pPr>
             <a:r>
-              <a:rPr sz="1600" b="0" i="0">
+              <a:rPr sz="1700" b="0" i="0">
                 <a:solidFill>
                   <a:srgbClr val="181D27"/>
                 </a:solidFill>
@@ -4669,7 +4669,7 @@
           <a:p>
             <a:pPr algn="l"/>
             <a:r>
-              <a:rPr sz="1600" b="1" i="0">
+              <a:rPr sz="1700" b="1" i="0">
                 <a:solidFill>
                   <a:srgbClr val="2B5CE6"/>
                 </a:solidFill>
@@ -4714,7 +4714,7 @@
               </a:lnSpc>
             </a:pPr>
             <a:r>
-              <a:rPr sz="1600" b="0" i="0">
+              <a:rPr sz="1700" b="0" i="0">
                 <a:solidFill>
                   <a:srgbClr val="181D27"/>
                 </a:solidFill>
@@ -4749,7 +4749,7 @@
           <a:p>
             <a:pPr algn="l"/>
             <a:r>
-              <a:rPr sz="1600" b="1" i="0">
+              <a:rPr sz="1700" b="1" i="0">
                 <a:solidFill>
                   <a:srgbClr val="2B5CE6"/>
                 </a:solidFill>
@@ -4784,9 +4784,9 @@
           <a:p>
             <a:pPr algn="ctr"/>
             <a:r>
-              <a:rPr sz="1700" b="0" i="1">
-                <a:solidFill>
-                  <a:srgbClr val="6B7484"/>
+              <a:rPr sz="1800" b="0" i="1">
+                <a:solidFill>
+                  <a:srgbClr val="181D27"/>
                 </a:solidFill>
                 <a:latin typeface="Arial"/>
               </a:rPr>
@@ -4988,7 +4988,7 @@
             <a:r>
               <a:rPr sz="1800" b="0" i="0">
                 <a:solidFill>
-                  <a:srgbClr val="6B7484"/>
+                  <a:srgbClr val="181D27"/>
                 </a:solidFill>
                 <a:latin typeface="Arial"/>
               </a:rPr>
@@ -5006,7 +5006,7 @@
         <p:spPr>
           <a:xfrm>
             <a:off x="777240" y="2487168"/>
-            <a:ext cx="10637215" cy="461010"/>
+            <a:ext cx="10637215" cy="384048"/>
           </a:xfrm>
           <a:prstGeom prst="roundRect">
             <a:avLst>
@@ -5050,7 +5050,7 @@
         </p:nvSpPr>
         <p:spPr>
           <a:xfrm>
-            <a:off x="1051560" y="2580513"/>
+            <a:off x="1051560" y="2542032"/>
             <a:ext cx="457200" cy="292608"/>
           </a:xfrm>
           <a:prstGeom prst="rect">
@@ -5085,8 +5085,8 @@
         </p:nvSpPr>
         <p:spPr>
           <a:xfrm>
-            <a:off x="777240" y="3057906"/>
-            <a:ext cx="10637215" cy="461010"/>
+            <a:off x="777240" y="2980944"/>
+            <a:ext cx="10637215" cy="384048"/>
           </a:xfrm>
           <a:prstGeom prst="roundRect">
             <a:avLst>
@@ -5130,7 +5130,7 @@
         </p:nvSpPr>
         <p:spPr>
           <a:xfrm>
-            <a:off x="1051560" y="3151251"/>
+            <a:off x="1051560" y="3035808"/>
             <a:ext cx="457200" cy="292608"/>
           </a:xfrm>
           <a:prstGeom prst="rect">
@@ -5165,8 +5165,8 @@
         </p:nvSpPr>
         <p:spPr>
           <a:xfrm>
-            <a:off x="777240" y="3628644"/>
-            <a:ext cx="10637215" cy="461010"/>
+            <a:off x="777240" y="3474720"/>
+            <a:ext cx="10637215" cy="384048"/>
           </a:xfrm>
           <a:prstGeom prst="roundRect">
             <a:avLst>
@@ -5212,7 +5212,7 @@
         </p:nvSpPr>
         <p:spPr>
           <a:xfrm>
-            <a:off x="1051560" y="3721989"/>
+            <a:off x="1051560" y="3529584"/>
             <a:ext cx="457200" cy="292608"/>
           </a:xfrm>
           <a:prstGeom prst="rect">
@@ -5247,7 +5247,7 @@
         </p:nvSpPr>
         <p:spPr>
           <a:xfrm>
-            <a:off x="10317175" y="3740277"/>
+            <a:off x="10317175" y="3547872"/>
             <a:ext cx="822960" cy="274320"/>
           </a:xfrm>
           <a:prstGeom prst="rect">
@@ -5282,8 +5282,8 @@
         </p:nvSpPr>
         <p:spPr>
           <a:xfrm>
-            <a:off x="777240" y="4199382"/>
-            <a:ext cx="10637215" cy="461010"/>
+            <a:off x="777240" y="3968496"/>
+            <a:ext cx="10637215" cy="384048"/>
           </a:xfrm>
           <a:prstGeom prst="roundRect">
             <a:avLst>
@@ -5327,7 +5327,7 @@
         </p:nvSpPr>
         <p:spPr>
           <a:xfrm>
-            <a:off x="1051560" y="4292727"/>
+            <a:off x="1051560" y="4023360"/>
             <a:ext cx="457200" cy="292608"/>
           </a:xfrm>
           <a:prstGeom prst="rect">
@@ -5362,8 +5362,8 @@
         </p:nvSpPr>
         <p:spPr>
           <a:xfrm>
-            <a:off x="777240" y="4898136"/>
-            <a:ext cx="10637215" cy="1356360"/>
+            <a:off x="777240" y="4590288"/>
+            <a:ext cx="10637215" cy="1664208"/>
           </a:xfrm>
           <a:prstGeom prst="roundRect">
             <a:avLst>
@@ -5388,7 +5388,7 @@
               </a:lnSpc>
             </a:pPr>
             <a:r>
-              <a:rPr sz="1700" b="0" i="0">
+              <a:rPr sz="1800" b="0" i="0">
                 <a:solidFill>
                   <a:srgbClr val="181D27"/>
                 </a:solidFill>
@@ -5586,7 +5586,7 @@
             <a:r>
               <a:rPr sz="2000" b="0" i="0">
                 <a:solidFill>
-                  <a:srgbClr val="6B7484"/>
+                  <a:srgbClr val="181D27"/>
                 </a:solidFill>
                 <a:latin typeface="Arial"/>
               </a:rPr>
@@ -5703,9 +5703,9 @@
               <a:buChar char="·"/>
             </a:pPr>
             <a:r>
-              <a:rPr sz="1600" b="0" i="0">
-                <a:solidFill>
-                  <a:srgbClr val="6B7484"/>
+              <a:rPr sz="1700" b="0" i="0">
+                <a:solidFill>
+                  <a:srgbClr val="181D27"/>
                 </a:solidFill>
                 <a:latin typeface="Arial"/>
               </a:rPr>
@@ -5937,7 +5937,7 @@
         <p:spPr>
           <a:xfrm>
             <a:off x="777240" y="5613404"/>
-            <a:ext cx="10637215" cy="827024"/>
+            <a:ext cx="10637215" cy="861568"/>
           </a:xfrm>
           <a:prstGeom prst="rect">
             <a:avLst/>
@@ -5956,9 +5956,9 @@
               </a:lnSpc>
             </a:pPr>
             <a:r>
-              <a:rPr sz="1600" b="0" i="0">
-                <a:solidFill>
-                  <a:srgbClr val="6B7484"/>
+              <a:rPr sz="1700" b="0" i="0">
+                <a:solidFill>
+                  <a:srgbClr val="181D27"/>
                 </a:solidFill>
                 <a:latin typeface="Arial"/>
               </a:rPr>
@@ -6154,7 +6154,7 @@
             <a:r>
               <a:rPr sz="2000" b="0" i="0">
                 <a:solidFill>
-                  <a:srgbClr val="6B7484"/>
+                  <a:srgbClr val="181D27"/>
                 </a:solidFill>
                 <a:latin typeface="Arial"/>
               </a:rPr>
@@ -6338,9 +6338,9 @@
               </a:lnSpc>
             </a:pPr>
             <a:r>
-              <a:rPr sz="1700" b="0" i="0">
-                <a:solidFill>
-                  <a:srgbClr val="6B7484"/>
+              <a:rPr sz="1800" b="0" i="0">
+                <a:solidFill>
+                  <a:srgbClr val="181D27"/>
                 </a:solidFill>
                 <a:latin typeface="Arial"/>
               </a:rPr>
@@ -6416,9 +6416,9 @@
               </a:lnSpc>
             </a:pPr>
             <a:r>
-              <a:rPr sz="1700" b="0" i="0">
-                <a:solidFill>
-                  <a:srgbClr val="6B7484"/>
+              <a:rPr sz="1800" b="0" i="0">
+                <a:solidFill>
+                  <a:srgbClr val="181D27"/>
                 </a:solidFill>
                 <a:latin typeface="Arial"/>
               </a:rPr>
@@ -6600,8 +6600,8 @@
         </p:blipFill>
         <p:spPr>
           <a:xfrm>
-            <a:off x="2043099" y="1572768"/>
-            <a:ext cx="8105498" cy="3955288"/>
+            <a:off x="2078494" y="1572768"/>
+            <a:ext cx="8034707" cy="3920744"/>
           </a:xfrm>
           <a:prstGeom prst="rect">
             <a:avLst/>
@@ -6616,8 +6616,8 @@
         </p:nvSpPr>
         <p:spPr>
           <a:xfrm>
-            <a:off x="777240" y="5729224"/>
-            <a:ext cx="10637215" cy="827024"/>
+            <a:off x="777240" y="5694680"/>
+            <a:ext cx="10637215" cy="861568"/>
           </a:xfrm>
           <a:prstGeom prst="rect">
             <a:avLst/>
@@ -6636,9 +6636,9 @@
               </a:lnSpc>
             </a:pPr>
             <a:r>
-              <a:rPr sz="1600" b="0" i="0">
-                <a:solidFill>
-                  <a:srgbClr val="6B7484"/>
+              <a:rPr sz="1700" b="0" i="0">
+                <a:solidFill>
+                  <a:srgbClr val="181D27"/>
                 </a:solidFill>
                 <a:latin typeface="Arial"/>
               </a:rPr>
@@ -6834,7 +6834,7 @@
             <a:r>
               <a:rPr sz="2000" b="0" i="0">
                 <a:solidFill>
-                  <a:srgbClr val="6B7484"/>
+                  <a:srgbClr val="181D27"/>
                 </a:solidFill>
                 <a:latin typeface="Arial"/>
               </a:rPr>
@@ -6877,7 +6877,7 @@
               </a:spcAft>
             </a:pPr>
             <a:r>
-              <a:rPr sz="1600" b="1" i="0">
+              <a:rPr sz="1700" b="1" i="0">
                 <a:solidFill>
                   <a:srgbClr val="2B5CE6"/>
                 </a:solidFill>
@@ -6938,7 +6938,7 @@
               </a:spcAft>
             </a:pPr>
             <a:r>
-              <a:rPr sz="1600" b="1" i="0">
+              <a:rPr sz="1700" b="1" i="0">
                 <a:solidFill>
                   <a:srgbClr val="2B5CE6"/>
                 </a:solidFill>
@@ -6999,7 +6999,7 @@
               </a:spcAft>
             </a:pPr>
             <a:r>
-              <a:rPr sz="1600" b="1" i="0">
+              <a:rPr sz="1700" b="1" i="0">
                 <a:solidFill>
                   <a:srgbClr val="2B5CE6"/>
                 </a:solidFill>
@@ -7060,7 +7060,7 @@
               </a:spcAft>
             </a:pPr>
             <a:r>
-              <a:rPr sz="1600" b="1" i="0">
+              <a:rPr sz="1700" b="1" i="0">
                 <a:solidFill>
                   <a:srgbClr val="2B5CE6"/>
                 </a:solidFill>
@@ -7121,7 +7121,7 @@
               </a:spcAft>
             </a:pPr>
             <a:r>
-              <a:rPr sz="1600" b="1" i="0">
+              <a:rPr sz="1700" b="1" i="0">
                 <a:solidFill>
                   <a:srgbClr val="2B5CE6"/>
                 </a:solidFill>
@@ -7182,7 +7182,7 @@
               </a:spcAft>
             </a:pPr>
             <a:r>
-              <a:rPr sz="1600" b="1" i="0">
+              <a:rPr sz="1700" b="1" i="0">
                 <a:solidFill>
                   <a:srgbClr val="2B5CE6"/>
                 </a:solidFill>
@@ -7401,7 +7401,7 @@
             <a:r>
               <a:rPr sz="1800" b="0" i="0">
                 <a:solidFill>
-                  <a:srgbClr val="6B7484"/>
+                  <a:srgbClr val="181D27"/>
                 </a:solidFill>
                 <a:latin typeface="Arial"/>
               </a:rPr>
@@ -7557,7 +7557,7 @@
             <a:r>
               <a:rPr sz="2000" b="0" i="0">
                 <a:solidFill>
-                  <a:srgbClr val="6B7484"/>
+                  <a:srgbClr val="181D27"/>
                 </a:solidFill>
                 <a:latin typeface="Arial"/>
               </a:rPr>
@@ -7701,9 +7701,9 @@
               <a:buChar char="·"/>
             </a:pPr>
             <a:r>
-              <a:rPr sz="1600" b="0" i="0">
-                <a:solidFill>
-                  <a:srgbClr val="6B7484"/>
+              <a:rPr sz="1700" b="0" i="0">
+                <a:solidFill>
+                  <a:srgbClr val="181D27"/>
                 </a:solidFill>
                 <a:latin typeface="Arial"/>
               </a:rPr>
@@ -7920,7 +7920,7 @@
             <a:r>
               <a:rPr sz="1400" b="0" i="0">
                 <a:solidFill>
-                  <a:srgbClr val="6B7484"/>
+                  <a:srgbClr val="181D27"/>
                 </a:solidFill>
                 <a:latin typeface="Arial"/>
               </a:rPr>
@@ -8013,7 +8013,7 @@
             <a:r>
               <a:rPr sz="1400" b="0" i="0">
                 <a:solidFill>
-                  <a:srgbClr val="6B7484"/>
+                  <a:srgbClr val="181D27"/>
                 </a:solidFill>
                 <a:latin typeface="Arial"/>
               </a:rPr>
@@ -8106,7 +8106,7 @@
             <a:r>
               <a:rPr sz="1400" b="0" i="0">
                 <a:solidFill>
-                  <a:srgbClr val="6B7484"/>
+                  <a:srgbClr val="181D27"/>
                 </a:solidFill>
                 <a:latin typeface="Arial"/>
               </a:rPr>
@@ -8143,9 +8143,9 @@
               </a:lnSpc>
             </a:pPr>
             <a:r>
-              <a:rPr sz="1600" b="0" i="0">
-                <a:solidFill>
-                  <a:srgbClr val="6B7484"/>
+              <a:rPr sz="1500" b="0" i="0">
+                <a:solidFill>
+                  <a:srgbClr val="181D27"/>
                 </a:solidFill>
                 <a:latin typeface="Arial"/>
               </a:rPr>
@@ -8369,7 +8369,7 @@
               <a:buChar char="—"/>
             </a:pPr>
             <a:r>
-              <a:rPr sz="1600" b="0" i="0">
+              <a:rPr sz="1700" b="0" i="0">
                 <a:solidFill>
                   <a:srgbClr val="181D27"/>
                 </a:solidFill>
@@ -8393,7 +8393,7 @@
               <a:buChar char="—"/>
             </a:pPr>
             <a:r>
-              <a:rPr sz="1600" b="0" i="0">
+              <a:rPr sz="1700" b="0" i="0">
                 <a:solidFill>
                   <a:srgbClr val="181D27"/>
                 </a:solidFill>
@@ -8417,7 +8417,7 @@
               <a:buChar char="—"/>
             </a:pPr>
             <a:r>
-              <a:rPr sz="1600" b="0" i="0">
+              <a:rPr sz="1700" b="0" i="0">
                 <a:solidFill>
                   <a:srgbClr val="181D27"/>
                 </a:solidFill>
@@ -8441,7 +8441,7 @@
               <a:buChar char="—"/>
             </a:pPr>
             <a:r>
-              <a:rPr sz="1600" b="0" i="0">
+              <a:rPr sz="1700" b="0" i="0">
                 <a:solidFill>
                   <a:srgbClr val="181D27"/>
                 </a:solidFill>
@@ -8465,7 +8465,7 @@
               <a:buChar char="—"/>
             </a:pPr>
             <a:r>
-              <a:rPr sz="1600" b="1" i="0">
+              <a:rPr sz="1700" b="1" i="0">
                 <a:solidFill>
                   <a:srgbClr val="181D27"/>
                 </a:solidFill>
@@ -8534,7 +8534,7 @@
               <a:buChar char="—"/>
             </a:pPr>
             <a:r>
-              <a:rPr sz="1600" b="0" i="0">
+              <a:rPr sz="1700" b="0" i="0">
                 <a:solidFill>
                   <a:srgbClr val="181D27"/>
                 </a:solidFill>
@@ -8558,7 +8558,7 @@
               <a:buChar char="—"/>
             </a:pPr>
             <a:r>
-              <a:rPr sz="1600" b="0" i="0">
+              <a:rPr sz="1700" b="0" i="0">
                 <a:solidFill>
                   <a:srgbClr val="181D27"/>
                 </a:solidFill>
@@ -8582,7 +8582,7 @@
               <a:buChar char="—"/>
             </a:pPr>
             <a:r>
-              <a:rPr sz="1600" b="0" i="0">
+              <a:rPr sz="1700" b="0" i="0">
                 <a:solidFill>
                   <a:srgbClr val="181D27"/>
                 </a:solidFill>
@@ -8606,7 +8606,7 @@
               <a:buChar char="—"/>
             </a:pPr>
             <a:r>
-              <a:rPr sz="1600" b="0" i="0">
+              <a:rPr sz="1700" b="0" i="0">
                 <a:solidFill>
                   <a:srgbClr val="181D27"/>
                 </a:solidFill>
@@ -8630,7 +8630,7 @@
               <a:buChar char="—"/>
             </a:pPr>
             <a:r>
-              <a:rPr sz="1600" b="0" i="0">
+              <a:rPr sz="1700" b="0" i="0">
                 <a:solidFill>
                   <a:srgbClr val="181D27"/>
                 </a:solidFill>
@@ -8833,7 +8833,7 @@
             <a:r>
               <a:rPr sz="1800" b="0" i="0">
                 <a:solidFill>
-                  <a:srgbClr val="6B7484"/>
+                  <a:srgbClr val="181D27"/>
                 </a:solidFill>
                 <a:latin typeface="Arial"/>
               </a:rPr>
@@ -8993,7 +8993,7 @@
               </a:spcAft>
             </a:pPr>
             <a:r>
-              <a:rPr sz="1600" b="1" i="0">
+              <a:rPr sz="1700" b="1" i="0">
                 <a:solidFill>
                   <a:srgbClr val="2B5CE6"/>
                 </a:solidFill>
@@ -9054,7 +9054,7 @@
               </a:spcAft>
             </a:pPr>
             <a:r>
-              <a:rPr sz="1600" b="1" i="0">
+              <a:rPr sz="1700" b="1" i="0">
                 <a:solidFill>
                   <a:srgbClr val="2B5CE6"/>
                 </a:solidFill>
@@ -9115,7 +9115,7 @@
               </a:spcAft>
             </a:pPr>
             <a:r>
-              <a:rPr sz="1600" b="1" i="0">
+              <a:rPr sz="1700" b="1" i="0">
                 <a:solidFill>
                   <a:srgbClr val="2B5CE6"/>
                 </a:solidFill>
@@ -9370,7 +9370,7 @@
               <a:buChar char="—"/>
             </a:pPr>
             <a:r>
-              <a:rPr sz="1600" b="0" i="0">
+              <a:rPr sz="1700" b="0" i="0">
                 <a:solidFill>
                   <a:srgbClr val="181D27"/>
                 </a:solidFill>
@@ -9394,7 +9394,7 @@
               <a:buChar char="—"/>
             </a:pPr>
             <a:r>
-              <a:rPr sz="1600" b="0" i="0">
+              <a:rPr sz="1700" b="0" i="0">
                 <a:solidFill>
                   <a:srgbClr val="181D27"/>
                 </a:solidFill>
@@ -9418,7 +9418,7 @@
               <a:buChar char="—"/>
             </a:pPr>
             <a:r>
-              <a:rPr sz="1600" b="0" i="0">
+              <a:rPr sz="1700" b="0" i="0">
                 <a:solidFill>
                   <a:srgbClr val="181D27"/>
                 </a:solidFill>
@@ -9442,7 +9442,7 @@
               <a:buChar char="—"/>
             </a:pPr>
             <a:r>
-              <a:rPr sz="1600" b="0" i="0">
+              <a:rPr sz="1700" b="0" i="0">
                 <a:solidFill>
                   <a:srgbClr val="181D27"/>
                 </a:solidFill>
@@ -9524,7 +9524,7 @@
               <a:buChar char="—"/>
             </a:pPr>
             <a:r>
-              <a:rPr sz="1600" b="0" i="0">
+              <a:rPr sz="1700" b="0" i="0">
                 <a:solidFill>
                   <a:srgbClr val="181D27"/>
                 </a:solidFill>
@@ -9548,7 +9548,7 @@
               <a:buChar char="—"/>
             </a:pPr>
             <a:r>
-              <a:rPr sz="1600" b="0" i="0">
+              <a:rPr sz="1700" b="0" i="0">
                 <a:solidFill>
                   <a:srgbClr val="181D27"/>
                 </a:solidFill>
@@ -9572,7 +9572,7 @@
               <a:buChar char="—"/>
             </a:pPr>
             <a:r>
-              <a:rPr sz="1600" b="0" i="0">
+              <a:rPr sz="1700" b="0" i="0">
                 <a:solidFill>
                   <a:srgbClr val="181D27"/>
                 </a:solidFill>
@@ -9596,7 +9596,7 @@
               <a:buChar char="—"/>
             </a:pPr>
             <a:r>
-              <a:rPr sz="1600" b="0" i="0">
+              <a:rPr sz="1700" b="0" i="0">
                 <a:solidFill>
                   <a:srgbClr val="181D27"/>
                 </a:solidFill>
@@ -9780,8 +9780,8 @@
         </p:blipFill>
         <p:spPr>
           <a:xfrm>
-            <a:off x="993642" y="1572768"/>
-            <a:ext cx="10204411" cy="3678936"/>
+            <a:off x="1065504" y="1572768"/>
+            <a:ext cx="10060687" cy="3627120"/>
           </a:xfrm>
           <a:prstGeom prst="rect">
             <a:avLst/>
@@ -9796,8 +9796,8 @@
         </p:nvSpPr>
         <p:spPr>
           <a:xfrm>
-            <a:off x="777240" y="5452872"/>
-            <a:ext cx="10637215" cy="1103376"/>
+            <a:off x="777240" y="5401056"/>
+            <a:ext cx="10637215" cy="1155192"/>
           </a:xfrm>
           <a:prstGeom prst="rect">
             <a:avLst/>
@@ -9816,9 +9816,9 @@
               </a:lnSpc>
             </a:pPr>
             <a:r>
-              <a:rPr sz="1600" b="0" i="0">
-                <a:solidFill>
-                  <a:srgbClr val="6B7484"/>
+              <a:rPr sz="1700" b="0" i="0">
+                <a:solidFill>
+                  <a:srgbClr val="181D27"/>
                 </a:solidFill>
                 <a:latin typeface="Arial"/>
               </a:rPr>
@@ -10055,7 +10055,7 @@
               <a:buChar char="—"/>
             </a:pPr>
             <a:r>
-              <a:rPr sz="1600" b="0" i="0">
+              <a:rPr sz="1700" b="0" i="0">
                 <a:solidFill>
                   <a:srgbClr val="181D27"/>
                 </a:solidFill>
@@ -10079,7 +10079,7 @@
               <a:buChar char="—"/>
             </a:pPr>
             <a:r>
-              <a:rPr sz="1600" b="0" i="0">
+              <a:rPr sz="1700" b="0" i="0">
                 <a:solidFill>
                   <a:srgbClr val="181D27"/>
                 </a:solidFill>
@@ -10103,7 +10103,7 @@
               <a:buChar char="—"/>
             </a:pPr>
             <a:r>
-              <a:rPr sz="1600" b="0" i="0">
+              <a:rPr sz="1700" b="0" i="0">
                 <a:solidFill>
                   <a:srgbClr val="181D27"/>
                 </a:solidFill>
@@ -10185,7 +10185,7 @@
               <a:buChar char="—"/>
             </a:pPr>
             <a:r>
-              <a:rPr sz="1600" b="0" i="0">
+              <a:rPr sz="1700" b="0" i="0">
                 <a:solidFill>
                   <a:srgbClr val="181D27"/>
                 </a:solidFill>
@@ -10209,7 +10209,7 @@
               <a:buChar char="—"/>
             </a:pPr>
             <a:r>
-              <a:rPr sz="1600" b="0" i="0">
+              <a:rPr sz="1700" b="0" i="0">
                 <a:solidFill>
                   <a:srgbClr val="181D27"/>
                 </a:solidFill>
@@ -10233,7 +10233,7 @@
               <a:buChar char="—"/>
             </a:pPr>
             <a:r>
-              <a:rPr sz="1600" b="0" i="0">
+              <a:rPr sz="1700" b="0" i="0">
                 <a:solidFill>
                   <a:srgbClr val="181D27"/>
                 </a:solidFill>
@@ -10454,9 +10454,9 @@
               </a:lnSpc>
             </a:pPr>
             <a:r>
-              <a:rPr sz="1700" b="0" i="0">
-                <a:solidFill>
-                  <a:srgbClr val="6B7484"/>
+              <a:rPr sz="1800" b="0" i="0">
+                <a:solidFill>
+                  <a:srgbClr val="181D27"/>
                 </a:solidFill>
                 <a:latin typeface="Arial"/>
               </a:rPr>
@@ -10657,7 +10657,7 @@
             <a:r>
               <a:rPr sz="1800" b="0" i="0">
                 <a:solidFill>
-                  <a:srgbClr val="6B7484"/>
+                  <a:srgbClr val="181D27"/>
                 </a:solidFill>
                 <a:latin typeface="Arial"/>
               </a:rPr>
@@ -10836,7 +10836,7 @@
             <a:r>
               <a:rPr sz="1400" b="0" i="0">
                 <a:solidFill>
-                  <a:srgbClr val="6B7484"/>
+                  <a:srgbClr val="181D27"/>
                 </a:solidFill>
                 <a:latin typeface="Arial"/>
               </a:rPr>
@@ -10931,7 +10931,7 @@
             <a:r>
               <a:rPr sz="1400" b="0" i="0">
                 <a:solidFill>
-                  <a:srgbClr val="6B7484"/>
+                  <a:srgbClr val="181D27"/>
                 </a:solidFill>
                 <a:latin typeface="Arial"/>
               </a:rPr>
@@ -10968,9 +10968,9 @@
               </a:lnSpc>
             </a:pPr>
             <a:r>
-              <a:rPr sz="1600" b="0" i="0">
-                <a:solidFill>
-                  <a:srgbClr val="6B7484"/>
+              <a:rPr sz="1500" b="0" i="0">
+                <a:solidFill>
+                  <a:srgbClr val="181D27"/>
                 </a:solidFill>
                 <a:latin typeface="Arial"/>
               </a:rPr>
@@ -11295,9 +11295,9 @@
               <a:buChar char="·"/>
             </a:pPr>
             <a:r>
-              <a:rPr sz="1600" b="0" i="0">
-                <a:solidFill>
-                  <a:srgbClr val="6B7484"/>
+              <a:rPr sz="1700" b="0" i="0">
+                <a:solidFill>
+                  <a:srgbClr val="181D27"/>
                 </a:solidFill>
                 <a:latin typeface="Arial"/>
               </a:rPr>
@@ -11479,8 +11479,8 @@
         </p:blipFill>
         <p:spPr>
           <a:xfrm>
-            <a:off x="1884481" y="1572768"/>
-            <a:ext cx="8422733" cy="3678936"/>
+            <a:off x="1943796" y="1572768"/>
+            <a:ext cx="8304103" cy="3627120"/>
           </a:xfrm>
           <a:prstGeom prst="rect">
             <a:avLst/>
@@ -11495,8 +11495,8 @@
         </p:nvSpPr>
         <p:spPr>
           <a:xfrm>
-            <a:off x="777240" y="5452872"/>
-            <a:ext cx="10637215" cy="1103376"/>
+            <a:off x="777240" y="5401056"/>
+            <a:ext cx="10637215" cy="1155192"/>
           </a:xfrm>
           <a:prstGeom prst="rect">
             <a:avLst/>
@@ -11515,9 +11515,9 @@
               </a:lnSpc>
             </a:pPr>
             <a:r>
-              <a:rPr sz="1600" b="0" i="0">
-                <a:solidFill>
-                  <a:srgbClr val="6B7484"/>
+              <a:rPr sz="1700" b="0" i="0">
+                <a:solidFill>
+                  <a:srgbClr val="181D27"/>
                 </a:solidFill>
                 <a:latin typeface="Arial"/>
               </a:rPr>
@@ -11873,9 +11873,9 @@
               </a:lnSpc>
             </a:pPr>
             <a:r>
-              <a:rPr sz="1700" b="0" i="0">
-                <a:solidFill>
-                  <a:srgbClr val="6B7484"/>
+              <a:rPr sz="1800" b="0" i="0">
+                <a:solidFill>
+                  <a:srgbClr val="181D27"/>
                 </a:solidFill>
                 <a:latin typeface="Arial"/>
               </a:rPr>
@@ -12071,7 +12071,7 @@
             <a:r>
               <a:rPr sz="2000" b="0" i="0">
                 <a:solidFill>
-                  <a:srgbClr val="6B7484"/>
+                  <a:srgbClr val="181D27"/>
                 </a:solidFill>
                 <a:latin typeface="Arial"/>
               </a:rPr>
@@ -12117,7 +12117,7 @@
                       <a:r>
                         <a:rPr sz="1500" b="1" i="0">
                           <a:solidFill>
-                            <a:srgbClr val="6B7484"/>
+                            <a:srgbClr val="181D27"/>
                           </a:solidFill>
                           <a:latin typeface="Arial"/>
                         </a:rPr>
@@ -12153,7 +12153,7 @@
                       <a:r>
                         <a:rPr sz="1500" b="1" i="0">
                           <a:solidFill>
-                            <a:srgbClr val="6B7484"/>
+                            <a:srgbClr val="181D27"/>
                           </a:solidFill>
                           <a:latin typeface="Arial"/>
                         </a:rPr>
@@ -12189,7 +12189,7 @@
                       <a:r>
                         <a:rPr sz="1500" b="1" i="0">
                           <a:solidFill>
-                            <a:srgbClr val="6B7484"/>
+                            <a:srgbClr val="181D27"/>
                           </a:solidFill>
                           <a:latin typeface="Arial"/>
                         </a:rPr>
@@ -13278,9 +13278,9 @@
               </a:lnSpc>
             </a:pPr>
             <a:r>
-              <a:rPr sz="1700" b="0" i="0">
-                <a:solidFill>
-                  <a:srgbClr val="6B7484"/>
+              <a:rPr sz="1800" b="0" i="0">
+                <a:solidFill>
+                  <a:srgbClr val="181D27"/>
                 </a:solidFill>
                 <a:latin typeface="Arial"/>
               </a:rPr>
@@ -13481,7 +13481,7 @@
             <a:r>
               <a:rPr sz="1800" b="0" i="0">
                 <a:solidFill>
-                  <a:srgbClr val="6B7484"/>
+                  <a:srgbClr val="181D27"/>
                 </a:solidFill>
                 <a:latin typeface="Arial"/>
               </a:rPr>
@@ -13766,9 +13766,9 @@
               <a:buChar char="·"/>
             </a:pPr>
             <a:r>
-              <a:rPr sz="1600" b="0" i="0">
-                <a:solidFill>
-                  <a:srgbClr val="6B7484"/>
+              <a:rPr sz="1700" b="0" i="0">
+                <a:solidFill>
+                  <a:srgbClr val="181D27"/>
                 </a:solidFill>
                 <a:latin typeface="Arial"/>
               </a:rPr>
@@ -13967,7 +13967,7 @@
         <p:spPr>
           <a:xfrm>
             <a:off x="777240" y="4639012"/>
-            <a:ext cx="10637215" cy="827024"/>
+            <a:ext cx="10637215" cy="1155192"/>
           </a:xfrm>
           <a:prstGeom prst="rect">
             <a:avLst/>
@@ -13986,9 +13986,9 @@
               </a:lnSpc>
             </a:pPr>
             <a:r>
-              <a:rPr sz="1600" b="0" i="0">
-                <a:solidFill>
-                  <a:srgbClr val="6B7484"/>
+              <a:rPr sz="1700" b="0" i="0">
+                <a:solidFill>
+                  <a:srgbClr val="181D27"/>
                 </a:solidFill>
                 <a:latin typeface="Arial"/>
               </a:rPr>
@@ -14233,7 +14233,7 @@
               </a:lnSpc>
             </a:pPr>
             <a:r>
-              <a:rPr sz="1600" b="0" i="0">
+              <a:rPr sz="1700" b="0" i="0">
                 <a:solidFill>
                   <a:srgbClr val="181D27"/>
                 </a:solidFill>
@@ -14268,7 +14268,7 @@
           <a:p>
             <a:pPr algn="l"/>
             <a:r>
-              <a:rPr sz="1600" b="1" i="0">
+              <a:rPr sz="1700" b="1" i="0">
                 <a:solidFill>
                   <a:srgbClr val="2B5CE6"/>
                 </a:solidFill>
@@ -14313,7 +14313,7 @@
               </a:lnSpc>
             </a:pPr>
             <a:r>
-              <a:rPr sz="1600" b="0" i="0">
+              <a:rPr sz="1700" b="0" i="0">
                 <a:solidFill>
                   <a:srgbClr val="181D27"/>
                 </a:solidFill>
@@ -14348,7 +14348,7 @@
           <a:p>
             <a:pPr algn="l"/>
             <a:r>
-              <a:rPr sz="1600" b="1" i="0">
+              <a:rPr sz="1700" b="1" i="0">
                 <a:solidFill>
                   <a:srgbClr val="2B5CE6"/>
                 </a:solidFill>
@@ -14393,7 +14393,7 @@
               </a:lnSpc>
             </a:pPr>
             <a:r>
-              <a:rPr sz="1600" b="0" i="0">
+              <a:rPr sz="1700" b="0" i="0">
                 <a:solidFill>
                   <a:srgbClr val="181D27"/>
                 </a:solidFill>
@@ -14428,7 +14428,7 @@
           <a:p>
             <a:pPr algn="l"/>
             <a:r>
-              <a:rPr sz="1600" b="1" i="0">
+              <a:rPr sz="1700" b="1" i="0">
                 <a:solidFill>
                   <a:srgbClr val="2B5CE6"/>
                 </a:solidFill>
@@ -14473,7 +14473,7 @@
               </a:lnSpc>
             </a:pPr>
             <a:r>
-              <a:rPr sz="1600" b="0" i="0">
+              <a:rPr sz="1700" b="0" i="0">
                 <a:solidFill>
                   <a:srgbClr val="181D27"/>
                 </a:solidFill>
@@ -14508,7 +14508,7 @@
           <a:p>
             <a:pPr algn="l"/>
             <a:r>
-              <a:rPr sz="1600" b="1" i="0">
+              <a:rPr sz="1700" b="1" i="0">
                 <a:solidFill>
                   <a:srgbClr val="2B5CE6"/>
                 </a:solidFill>
@@ -14543,9 +14543,9 @@
           <a:p>
             <a:pPr algn="ctr"/>
             <a:r>
-              <a:rPr sz="1700" b="0" i="1">
-                <a:solidFill>
-                  <a:srgbClr val="6B7484"/>
+              <a:rPr sz="1800" b="0" i="1">
+                <a:solidFill>
+                  <a:srgbClr val="181D27"/>
                 </a:solidFill>
                 <a:latin typeface="Arial"/>
               </a:rPr>
@@ -14747,7 +14747,7 @@
             <a:r>
               <a:rPr sz="1800" b="0" i="0">
                 <a:solidFill>
-                  <a:srgbClr val="6B7484"/>
+                  <a:srgbClr val="181D27"/>
                 </a:solidFill>
                 <a:latin typeface="Arial"/>
               </a:rPr>
@@ -15147,7 +15147,7 @@
               </a:lnSpc>
             </a:pPr>
             <a:r>
-              <a:rPr sz="1700" b="0" i="0">
+              <a:rPr sz="1800" b="0" i="0">
                 <a:solidFill>
                   <a:srgbClr val="181D27"/>
                 </a:solidFill>
@@ -15352,7 +15352,7 @@
                       <a:r>
                         <a:rPr sz="1500" b="1" i="0">
                           <a:solidFill>
-                            <a:srgbClr val="6B7484"/>
+                            <a:srgbClr val="181D27"/>
                           </a:solidFill>
                           <a:latin typeface="Arial"/>
                         </a:rPr>
@@ -15388,7 +15388,7 @@
                       <a:r>
                         <a:rPr sz="1500" b="1" i="0">
                           <a:solidFill>
-                            <a:srgbClr val="6B7484"/>
+                            <a:srgbClr val="181D27"/>
                           </a:solidFill>
                           <a:latin typeface="Arial"/>
                         </a:rPr>
@@ -15424,7 +15424,7 @@
                       <a:r>
                         <a:rPr sz="1500" b="1" i="0">
                           <a:solidFill>
-                            <a:srgbClr val="6B7484"/>
+                            <a:srgbClr val="181D27"/>
                           </a:solidFill>
                           <a:latin typeface="Arial"/>
                         </a:rPr>
@@ -16547,7 +16547,7 @@
               <a:buChar char="—"/>
             </a:pPr>
             <a:r>
-              <a:rPr sz="1600" b="0" i="0">
+              <a:rPr sz="1700" b="0" i="0">
                 <a:solidFill>
                   <a:srgbClr val="181D27"/>
                 </a:solidFill>
@@ -16571,7 +16571,7 @@
               <a:buChar char="—"/>
             </a:pPr>
             <a:r>
-              <a:rPr sz="1600" b="0" i="0">
+              <a:rPr sz="1700" b="0" i="0">
                 <a:solidFill>
                   <a:srgbClr val="181D27"/>
                 </a:solidFill>
@@ -16595,7 +16595,7 @@
               <a:buChar char="—"/>
             </a:pPr>
             <a:r>
-              <a:rPr sz="1600" b="0" i="0">
+              <a:rPr sz="1700" b="0" i="0">
                 <a:solidFill>
                   <a:srgbClr val="181D27"/>
                 </a:solidFill>
@@ -16619,7 +16619,7 @@
               <a:buChar char="—"/>
             </a:pPr>
             <a:r>
-              <a:rPr sz="1600" b="0" i="0">
+              <a:rPr sz="1700" b="0" i="0">
                 <a:solidFill>
                   <a:srgbClr val="181D27"/>
                 </a:solidFill>
@@ -16688,7 +16688,7 @@
               <a:buChar char="—"/>
             </a:pPr>
             <a:r>
-              <a:rPr sz="1600" b="0" i="0">
+              <a:rPr sz="1700" b="0" i="0">
                 <a:solidFill>
                   <a:srgbClr val="181D27"/>
                 </a:solidFill>
@@ -16712,7 +16712,7 @@
               <a:buChar char="—"/>
             </a:pPr>
             <a:r>
-              <a:rPr sz="1600" b="0" i="0">
+              <a:rPr sz="1700" b="0" i="0">
                 <a:solidFill>
                   <a:srgbClr val="181D27"/>
                 </a:solidFill>
@@ -16736,7 +16736,7 @@
               <a:buChar char="—"/>
             </a:pPr>
             <a:r>
-              <a:rPr sz="1600" b="0" i="0">
+              <a:rPr sz="1700" b="0" i="0">
                 <a:solidFill>
                   <a:srgbClr val="181D27"/>
                 </a:solidFill>
@@ -16760,7 +16760,7 @@
               <a:buChar char="—"/>
             </a:pPr>
             <a:r>
-              <a:rPr sz="1600" b="0" i="0">
+              <a:rPr sz="1700" b="0" i="0">
                 <a:solidFill>
                   <a:srgbClr val="181D27"/>
                 </a:solidFill>
@@ -16961,7 +16961,7 @@
         <p:spPr>
           <a:xfrm>
             <a:off x="777240" y="4767954"/>
-            <a:ext cx="10637215" cy="827024"/>
+            <a:ext cx="10637215" cy="861568"/>
           </a:xfrm>
           <a:prstGeom prst="rect">
             <a:avLst/>
@@ -16980,9 +16980,9 @@
               </a:lnSpc>
             </a:pPr>
             <a:r>
-              <a:rPr sz="1600" b="0" i="0">
-                <a:solidFill>
-                  <a:srgbClr val="6B7484"/>
+              <a:rPr sz="1700" b="0" i="0">
+                <a:solidFill>
+                  <a:srgbClr val="181D27"/>
                 </a:solidFill>
                 <a:latin typeface="Arial"/>
               </a:rPr>
@@ -17132,9 +17132,9 @@
               </a:lnSpc>
             </a:pPr>
             <a:r>
-              <a:rPr sz="1700" b="0" i="0">
-                <a:solidFill>
-                  <a:srgbClr val="6B7484"/>
+              <a:rPr sz="1800" b="0" i="0">
+                <a:solidFill>
+                  <a:srgbClr val="181D27"/>
                 </a:solidFill>
                 <a:latin typeface="Arial"/>
               </a:rPr>
@@ -17379,7 +17379,7 @@
               </a:lnSpc>
             </a:pPr>
             <a:r>
-              <a:rPr sz="1600" b="0" i="0">
+              <a:rPr sz="1700" b="0" i="0">
                 <a:solidFill>
                   <a:srgbClr val="181D27"/>
                 </a:solidFill>
@@ -17414,7 +17414,7 @@
           <a:p>
             <a:pPr algn="l"/>
             <a:r>
-              <a:rPr sz="1600" b="1" i="0">
+              <a:rPr sz="1700" b="1" i="0">
                 <a:solidFill>
                   <a:srgbClr val="2B5CE6"/>
                 </a:solidFill>
@@ -17459,7 +17459,7 @@
               </a:lnSpc>
             </a:pPr>
             <a:r>
-              <a:rPr sz="1600" b="0" i="0">
+              <a:rPr sz="1700" b="0" i="0">
                 <a:solidFill>
                   <a:srgbClr val="181D27"/>
                 </a:solidFill>
@@ -17494,7 +17494,7 @@
           <a:p>
             <a:pPr algn="l"/>
             <a:r>
-              <a:rPr sz="1600" b="1" i="0">
+              <a:rPr sz="1700" b="1" i="0">
                 <a:solidFill>
                   <a:srgbClr val="2B5CE6"/>
                 </a:solidFill>
@@ -17539,7 +17539,7 @@
               </a:lnSpc>
             </a:pPr>
             <a:r>
-              <a:rPr sz="1600" b="0" i="0">
+              <a:rPr sz="1700" b="0" i="0">
                 <a:solidFill>
                   <a:srgbClr val="181D27"/>
                 </a:solidFill>
@@ -17574,7 +17574,7 @@
           <a:p>
             <a:pPr algn="l"/>
             <a:r>
-              <a:rPr sz="1600" b="1" i="0">
+              <a:rPr sz="1700" b="1" i="0">
                 <a:solidFill>
                   <a:srgbClr val="2B5CE6"/>
                 </a:solidFill>
@@ -17619,7 +17619,7 @@
               </a:lnSpc>
             </a:pPr>
             <a:r>
-              <a:rPr sz="1600" b="0" i="0">
+              <a:rPr sz="1700" b="0" i="0">
                 <a:solidFill>
                   <a:srgbClr val="181D27"/>
                 </a:solidFill>
@@ -17654,7 +17654,7 @@
           <a:p>
             <a:pPr algn="l"/>
             <a:r>
-              <a:rPr sz="1600" b="1" i="0">
+              <a:rPr sz="1700" b="1" i="0">
                 <a:solidFill>
                   <a:srgbClr val="2B5CE6"/>
                 </a:solidFill>
@@ -17689,9 +17689,9 @@
           <a:p>
             <a:pPr algn="ctr"/>
             <a:r>
-              <a:rPr sz="1700" b="0" i="1">
-                <a:solidFill>
-                  <a:srgbClr val="6B7484"/>
+              <a:rPr sz="1800" b="0" i="1">
+                <a:solidFill>
+                  <a:srgbClr val="181D27"/>
                 </a:solidFill>
                 <a:latin typeface="Arial"/>
               </a:rPr>
@@ -17893,7 +17893,7 @@
             <a:r>
               <a:rPr sz="1800" b="0" i="0">
                 <a:solidFill>
-                  <a:srgbClr val="6B7484"/>
+                  <a:srgbClr val="181D27"/>
                 </a:solidFill>
                 <a:latin typeface="Arial"/>
               </a:rPr>
@@ -18293,7 +18293,7 @@
               </a:lnSpc>
             </a:pPr>
             <a:r>
-              <a:rPr sz="1700" b="0" i="0">
+              <a:rPr sz="1800" b="0" i="0">
                 <a:solidFill>
                   <a:srgbClr val="181D27"/>
                 </a:solidFill>
@@ -18491,7 +18491,7 @@
             <a:r>
               <a:rPr sz="2000" b="0" i="0">
                 <a:solidFill>
-                  <a:srgbClr val="6B7484"/>
+                  <a:srgbClr val="181D27"/>
                 </a:solidFill>
                 <a:latin typeface="Arial"/>
               </a:rPr>
@@ -18617,9 +18617,9 @@
               <a:buChar char="·"/>
             </a:pPr>
             <a:r>
-              <a:rPr sz="1600" b="0" i="0">
-                <a:solidFill>
-                  <a:srgbClr val="6B7484"/>
+              <a:rPr sz="1700" b="0" i="0">
+                <a:solidFill>
+                  <a:srgbClr val="181D27"/>
                 </a:solidFill>
                 <a:latin typeface="Arial"/>
               </a:rPr>
@@ -18801,8 +18801,8 @@
         </p:blipFill>
         <p:spPr>
           <a:xfrm>
-            <a:off x="2071006" y="1572768"/>
-            <a:ext cx="8049683" cy="3955288"/>
+            <a:off x="2106157" y="1572768"/>
+            <a:ext cx="7979381" cy="3920744"/>
           </a:xfrm>
           <a:prstGeom prst="rect">
             <a:avLst/>
@@ -18817,8 +18817,8 @@
         </p:nvSpPr>
         <p:spPr>
           <a:xfrm>
-            <a:off x="777240" y="5729224"/>
-            <a:ext cx="10637215" cy="827024"/>
+            <a:off x="777240" y="5694680"/>
+            <a:ext cx="10637215" cy="861568"/>
           </a:xfrm>
           <a:prstGeom prst="rect">
             <a:avLst/>
@@ -18837,9 +18837,9 @@
               </a:lnSpc>
             </a:pPr>
             <a:r>
-              <a:rPr sz="1600" b="0" i="0">
-                <a:solidFill>
-                  <a:srgbClr val="6B7484"/>
+              <a:rPr sz="1700" b="0" i="0">
+                <a:solidFill>
+                  <a:srgbClr val="181D27"/>
                 </a:solidFill>
                 <a:latin typeface="Arial"/>
               </a:rPr>
@@ -19041,7 +19041,7 @@
                       <a:r>
                         <a:rPr sz="1500" b="1" i="0">
                           <a:solidFill>
-                            <a:srgbClr val="6B7484"/>
+                            <a:srgbClr val="181D27"/>
                           </a:solidFill>
                           <a:latin typeface="Arial"/>
                         </a:rPr>
@@ -19077,7 +19077,7 @@
                       <a:r>
                         <a:rPr sz="1500" b="1" i="0">
                           <a:solidFill>
-                            <a:srgbClr val="6B7484"/>
+                            <a:srgbClr val="181D27"/>
                           </a:solidFill>
                           <a:latin typeface="Arial"/>
                         </a:rPr>
@@ -19662,7 +19662,7 @@
             <a:r>
               <a:rPr sz="2000" b="0" i="0">
                 <a:solidFill>
-                  <a:srgbClr val="6B7484"/>
+                  <a:srgbClr val="181D27"/>
                 </a:solidFill>
                 <a:latin typeface="Arial"/>
               </a:rPr>
@@ -19936,9 +19936,9 @@
               </a:lnSpc>
             </a:pPr>
             <a:r>
-              <a:rPr sz="1600" b="0" i="0">
-                <a:solidFill>
-                  <a:srgbClr val="6B7484"/>
+              <a:rPr sz="1700" b="0" i="0">
+                <a:solidFill>
+                  <a:srgbClr val="181D27"/>
                 </a:solidFill>
                 <a:latin typeface="Arial"/>
               </a:rPr>
@@ -20139,7 +20139,7 @@
             <a:r>
               <a:rPr sz="1800" b="0" i="0">
                 <a:solidFill>
-                  <a:srgbClr val="6B7484"/>
+                  <a:srgbClr val="181D27"/>
                 </a:solidFill>
                 <a:latin typeface="Arial"/>
               </a:rPr>
@@ -20302,7 +20302,7 @@
                       <a:r>
                         <a:rPr sz="1500" b="1" i="0">
                           <a:solidFill>
-                            <a:srgbClr val="6B7484"/>
+                            <a:srgbClr val="181D27"/>
                           </a:solidFill>
                           <a:latin typeface="Arial"/>
                         </a:rPr>
@@ -20338,7 +20338,7 @@
                       <a:r>
                         <a:rPr sz="1500" b="1" i="0">
                           <a:solidFill>
-                            <a:srgbClr val="6B7484"/>
+                            <a:srgbClr val="181D27"/>
                           </a:solidFill>
                           <a:latin typeface="Arial"/>
                         </a:rPr>
@@ -20374,7 +20374,7 @@
                       <a:r>
                         <a:rPr sz="1500" b="1" i="0">
                           <a:solidFill>
-                            <a:srgbClr val="6B7484"/>
+                            <a:srgbClr val="181D27"/>
                           </a:solidFill>
                           <a:latin typeface="Arial"/>
                         </a:rPr>
@@ -21490,7 +21490,7 @@
             <a:r>
               <a:rPr sz="1200" b="0" i="0">
                 <a:solidFill>
-                  <a:srgbClr val="6B7484"/>
+                  <a:srgbClr val="181D27"/>
                 </a:solidFill>
                 <a:latin typeface="Arial"/>
               </a:rPr>
@@ -21506,7 +21506,7 @@
             <a:r>
               <a:rPr sz="1200" b="0" i="0">
                 <a:solidFill>
-                  <a:srgbClr val="6B7484"/>
+                  <a:srgbClr val="181D27"/>
                 </a:solidFill>
                 <a:latin typeface="Arial"/>
               </a:rPr>
@@ -21599,7 +21599,7 @@
             <a:r>
               <a:rPr sz="1200" b="0" i="0">
                 <a:solidFill>
-                  <a:srgbClr val="6B7484"/>
+                  <a:srgbClr val="181D27"/>
                 </a:solidFill>
                 <a:latin typeface="Arial"/>
               </a:rPr>
@@ -21615,7 +21615,7 @@
             <a:r>
               <a:rPr sz="1200" b="0" i="0">
                 <a:solidFill>
-                  <a:srgbClr val="6B7484"/>
+                  <a:srgbClr val="181D27"/>
                 </a:solidFill>
                 <a:latin typeface="Arial"/>
               </a:rPr>
@@ -21708,7 +21708,7 @@
             <a:r>
               <a:rPr sz="1200" b="0" i="0">
                 <a:solidFill>
-                  <a:srgbClr val="6B7484"/>
+                  <a:srgbClr val="181D27"/>
                 </a:solidFill>
                 <a:latin typeface="Arial"/>
               </a:rPr>
@@ -21724,7 +21724,7 @@
             <a:r>
               <a:rPr sz="1200" b="0" i="0">
                 <a:solidFill>
-                  <a:srgbClr val="6B7484"/>
+                  <a:srgbClr val="181D27"/>
                 </a:solidFill>
                 <a:latin typeface="Arial"/>
               </a:rPr>
@@ -21817,7 +21817,7 @@
             <a:r>
               <a:rPr sz="1200" b="0" i="0">
                 <a:solidFill>
-                  <a:srgbClr val="6B7484"/>
+                  <a:srgbClr val="181D27"/>
                 </a:solidFill>
                 <a:latin typeface="Arial"/>
               </a:rPr>
@@ -21833,7 +21833,7 @@
             <a:r>
               <a:rPr sz="1200" b="0" i="0">
                 <a:solidFill>
-                  <a:srgbClr val="6B7484"/>
+                  <a:srgbClr val="181D27"/>
                 </a:solidFill>
                 <a:latin typeface="Arial"/>
               </a:rPr>
@@ -21926,7 +21926,7 @@
             <a:r>
               <a:rPr sz="1200" b="0" i="0">
                 <a:solidFill>
-                  <a:srgbClr val="6B7484"/>
+                  <a:srgbClr val="181D27"/>
                 </a:solidFill>
                 <a:latin typeface="Arial"/>
               </a:rPr>
@@ -21942,7 +21942,7 @@
             <a:r>
               <a:rPr sz="1200" b="0" i="0">
                 <a:solidFill>
-                  <a:srgbClr val="6B7484"/>
+                  <a:srgbClr val="181D27"/>
                 </a:solidFill>
                 <a:latin typeface="Arial"/>
               </a:rPr>
@@ -22035,7 +22035,7 @@
             <a:r>
               <a:rPr sz="1200" b="0" i="0">
                 <a:solidFill>
-                  <a:srgbClr val="6B7484"/>
+                  <a:srgbClr val="181D27"/>
                 </a:solidFill>
                 <a:latin typeface="Arial"/>
               </a:rPr>
@@ -22051,7 +22051,7 @@
             <a:r>
               <a:rPr sz="1200" b="0" i="0">
                 <a:solidFill>
-                  <a:srgbClr val="6B7484"/>
+                  <a:srgbClr val="181D27"/>
                 </a:solidFill>
                 <a:latin typeface="Arial"/>
               </a:rPr>
@@ -22088,9 +22088,9 @@
               </a:lnSpc>
             </a:pPr>
             <a:r>
-              <a:rPr sz="1600" b="0" i="0">
-                <a:solidFill>
-                  <a:srgbClr val="6B7484"/>
+              <a:rPr sz="1700" b="0" i="0">
+                <a:solidFill>
+                  <a:srgbClr val="181D27"/>
                 </a:solidFill>
                 <a:latin typeface="Arial"/>
               </a:rPr>
@@ -22335,7 +22335,7 @@
               </a:lnSpc>
             </a:pPr>
             <a:r>
-              <a:rPr sz="1600" b="0" i="0">
+              <a:rPr sz="1700" b="0" i="0">
                 <a:solidFill>
                   <a:srgbClr val="181D27"/>
                 </a:solidFill>
@@ -22370,7 +22370,7 @@
           <a:p>
             <a:pPr algn="l"/>
             <a:r>
-              <a:rPr sz="1600" b="1" i="0">
+              <a:rPr sz="1700" b="1" i="0">
                 <a:solidFill>
                   <a:srgbClr val="2B5CE6"/>
                 </a:solidFill>
@@ -22415,7 +22415,7 @@
               </a:lnSpc>
             </a:pPr>
             <a:r>
-              <a:rPr sz="1600" b="0" i="0">
+              <a:rPr sz="1700" b="0" i="0">
                 <a:solidFill>
                   <a:srgbClr val="181D27"/>
                 </a:solidFill>
@@ -22450,7 +22450,7 @@
           <a:p>
             <a:pPr algn="l"/>
             <a:r>
-              <a:rPr sz="1600" b="1" i="0">
+              <a:rPr sz="1700" b="1" i="0">
                 <a:solidFill>
                   <a:srgbClr val="2B5CE6"/>
                 </a:solidFill>
@@ -22495,7 +22495,7 @@
               </a:lnSpc>
             </a:pPr>
             <a:r>
-              <a:rPr sz="1600" b="0" i="0">
+              <a:rPr sz="1700" b="0" i="0">
                 <a:solidFill>
                   <a:srgbClr val="181D27"/>
                 </a:solidFill>
@@ -22530,7 +22530,7 @@
           <a:p>
             <a:pPr algn="l"/>
             <a:r>
-              <a:rPr sz="1600" b="1" i="0">
+              <a:rPr sz="1700" b="1" i="0">
                 <a:solidFill>
                   <a:srgbClr val="2B5CE6"/>
                 </a:solidFill>
@@ -22575,7 +22575,7 @@
               </a:lnSpc>
             </a:pPr>
             <a:r>
-              <a:rPr sz="1600" b="0" i="0">
+              <a:rPr sz="1700" b="0" i="0">
                 <a:solidFill>
                   <a:srgbClr val="181D27"/>
                 </a:solidFill>
@@ -22610,7 +22610,7 @@
           <a:p>
             <a:pPr algn="l"/>
             <a:r>
-              <a:rPr sz="1600" b="1" i="0">
+              <a:rPr sz="1700" b="1" i="0">
                 <a:solidFill>
                   <a:srgbClr val="2B5CE6"/>
                 </a:solidFill>
@@ -22645,9 +22645,9 @@
           <a:p>
             <a:pPr algn="ctr"/>
             <a:r>
-              <a:rPr sz="1700" b="0" i="1">
-                <a:solidFill>
-                  <a:srgbClr val="6B7484"/>
+              <a:rPr sz="1800" b="0" i="1">
+                <a:solidFill>
+                  <a:srgbClr val="181D27"/>
                 </a:solidFill>
                 <a:latin typeface="Arial"/>
               </a:rPr>
@@ -22849,7 +22849,7 @@
             <a:r>
               <a:rPr sz="1800" b="0" i="0">
                 <a:solidFill>
-                  <a:srgbClr val="6B7484"/>
+                  <a:srgbClr val="181D27"/>
                 </a:solidFill>
                 <a:latin typeface="Arial"/>
               </a:rPr>
@@ -22867,7 +22867,7 @@
         <p:spPr>
           <a:xfrm>
             <a:off x="777240" y="2487168"/>
-            <a:ext cx="10637215" cy="461010"/>
+            <a:ext cx="10637215" cy="448056"/>
           </a:xfrm>
           <a:prstGeom prst="roundRect">
             <a:avLst>
@@ -22911,7 +22911,7 @@
         </p:nvSpPr>
         <p:spPr>
           <a:xfrm>
-            <a:off x="1051560" y="2580513"/>
+            <a:off x="1051560" y="2574036"/>
             <a:ext cx="457200" cy="292608"/>
           </a:xfrm>
           <a:prstGeom prst="rect">
@@ -22946,8 +22946,8 @@
         </p:nvSpPr>
         <p:spPr>
           <a:xfrm>
-            <a:off x="777240" y="3057906"/>
-            <a:ext cx="10637215" cy="461010"/>
+            <a:off x="777240" y="3044952"/>
+            <a:ext cx="10637215" cy="448056"/>
           </a:xfrm>
           <a:prstGeom prst="roundRect">
             <a:avLst>
@@ -22991,7 +22991,7 @@
         </p:nvSpPr>
         <p:spPr>
           <a:xfrm>
-            <a:off x="1051560" y="3151251"/>
+            <a:off x="1051560" y="3131820"/>
             <a:ext cx="457200" cy="292608"/>
           </a:xfrm>
           <a:prstGeom prst="rect">
@@ -23026,8 +23026,8 @@
         </p:nvSpPr>
         <p:spPr>
           <a:xfrm>
-            <a:off x="777240" y="3628644"/>
-            <a:ext cx="10637215" cy="461010"/>
+            <a:off x="777240" y="3602736"/>
+            <a:ext cx="10637215" cy="448056"/>
           </a:xfrm>
           <a:prstGeom prst="roundRect">
             <a:avLst>
@@ -23073,7 +23073,7 @@
         </p:nvSpPr>
         <p:spPr>
           <a:xfrm>
-            <a:off x="1051560" y="3721989"/>
+            <a:off x="1051560" y="3689604"/>
             <a:ext cx="457200" cy="292608"/>
           </a:xfrm>
           <a:prstGeom prst="rect">
@@ -23108,7 +23108,7 @@
         </p:nvSpPr>
         <p:spPr>
           <a:xfrm>
-            <a:off x="10317175" y="3740277"/>
+            <a:off x="10317175" y="3707892"/>
             <a:ext cx="822960" cy="274320"/>
           </a:xfrm>
           <a:prstGeom prst="rect">
@@ -23143,8 +23143,8 @@
         </p:nvSpPr>
         <p:spPr>
           <a:xfrm>
-            <a:off x="777240" y="4199382"/>
-            <a:ext cx="10637215" cy="461010"/>
+            <a:off x="777240" y="4160520"/>
+            <a:ext cx="10637215" cy="448056"/>
           </a:xfrm>
           <a:prstGeom prst="roundRect">
             <a:avLst>
@@ -23188,7 +23188,7 @@
         </p:nvSpPr>
         <p:spPr>
           <a:xfrm>
-            <a:off x="1051560" y="4292727"/>
+            <a:off x="1051560" y="4247388"/>
             <a:ext cx="457200" cy="292608"/>
           </a:xfrm>
           <a:prstGeom prst="rect">
@@ -23223,8 +23223,8 @@
         </p:nvSpPr>
         <p:spPr>
           <a:xfrm>
-            <a:off x="777240" y="4898136"/>
-            <a:ext cx="10637215" cy="1356360"/>
+            <a:off x="777240" y="4846320"/>
+            <a:ext cx="10637215" cy="1408176"/>
           </a:xfrm>
           <a:prstGeom prst="roundRect">
             <a:avLst>
@@ -23249,7 +23249,7 @@
               </a:lnSpc>
             </a:pPr>
             <a:r>
-              <a:rPr sz="1700" b="0" i="0">
+              <a:rPr sz="1800" b="0" i="0">
                 <a:solidFill>
                   <a:srgbClr val="181D27"/>
                 </a:solidFill>
@@ -23433,8 +23433,8 @@
         </p:blipFill>
         <p:spPr>
           <a:xfrm>
-            <a:off x="1456615" y="1572768"/>
-            <a:ext cx="9278466" cy="3955288"/>
+            <a:off x="1497132" y="1572768"/>
+            <a:ext cx="9197431" cy="3920744"/>
           </a:xfrm>
           <a:prstGeom prst="rect">
             <a:avLst/>
@@ -23449,8 +23449,8 @@
         </p:nvSpPr>
         <p:spPr>
           <a:xfrm>
-            <a:off x="777240" y="5729224"/>
-            <a:ext cx="10637215" cy="827024"/>
+            <a:off x="777240" y="5694680"/>
+            <a:ext cx="10637215" cy="861568"/>
           </a:xfrm>
           <a:prstGeom prst="rect">
             <a:avLst/>
@@ -23469,9 +23469,9 @@
               </a:lnSpc>
             </a:pPr>
             <a:r>
-              <a:rPr sz="1600" b="0" i="0">
-                <a:solidFill>
-                  <a:srgbClr val="6B7484"/>
+              <a:rPr sz="1700" b="0" i="0">
+                <a:solidFill>
+                  <a:srgbClr val="181D27"/>
                 </a:solidFill>
                 <a:latin typeface="Arial"/>
               </a:rPr>
@@ -23779,7 +23779,7 @@
             <a:r>
               <a:rPr sz="2000" b="0" i="0">
                 <a:solidFill>
-                  <a:srgbClr val="6B7484"/>
+                  <a:srgbClr val="181D27"/>
                 </a:solidFill>
                 <a:latin typeface="Arial"/>
               </a:rPr>
@@ -23953,9 +23953,9 @@
               <a:buChar char="·"/>
             </a:pPr>
             <a:r>
-              <a:rPr sz="1600" b="0" i="0">
-                <a:solidFill>
-                  <a:srgbClr val="6B7484"/>
+              <a:rPr sz="1700" b="0" i="0">
+                <a:solidFill>
+                  <a:srgbClr val="181D27"/>
                 </a:solidFill>
                 <a:latin typeface="Arial"/>
               </a:rPr>
@@ -23977,9 +23977,9 @@
               <a:buChar char="·"/>
             </a:pPr>
             <a:r>
-              <a:rPr sz="1600" b="0" i="0">
-                <a:solidFill>
-                  <a:srgbClr val="6B7484"/>
+              <a:rPr sz="1700" b="0" i="0">
+                <a:solidFill>
+                  <a:srgbClr val="181D27"/>
                 </a:solidFill>
                 <a:latin typeface="Arial"/>
               </a:rPr>
@@ -24001,9 +24001,9 @@
               <a:buChar char="·"/>
             </a:pPr>
             <a:r>
-              <a:rPr sz="1600" b="0" i="0">
-                <a:solidFill>
-                  <a:srgbClr val="6B7484"/>
+              <a:rPr sz="1700" b="0" i="0">
+                <a:solidFill>
+                  <a:srgbClr val="181D27"/>
                 </a:solidFill>
                 <a:latin typeface="Arial"/>
               </a:rPr>
@@ -24025,9 +24025,9 @@
               <a:buChar char="·"/>
             </a:pPr>
             <a:r>
-              <a:rPr sz="1600" b="0" i="0">
-                <a:solidFill>
-                  <a:srgbClr val="6B7484"/>
+              <a:rPr sz="1700" b="0" i="0">
+                <a:solidFill>
+                  <a:srgbClr val="181D27"/>
                 </a:solidFill>
                 <a:latin typeface="Arial"/>
               </a:rPr>
@@ -24177,9 +24177,9 @@
               </a:lnSpc>
             </a:pPr>
             <a:r>
-              <a:rPr sz="1700" b="0" i="0">
-                <a:solidFill>
-                  <a:srgbClr val="6B7484"/>
+              <a:rPr sz="1800" b="0" i="0">
+                <a:solidFill>
+                  <a:srgbClr val="181D27"/>
                 </a:solidFill>
                 <a:latin typeface="Arial"/>
               </a:rPr>
@@ -24375,7 +24375,7 @@
             <a:r>
               <a:rPr sz="2000" b="0" i="0">
                 <a:solidFill>
-                  <a:srgbClr val="6B7484"/>
+                  <a:srgbClr val="181D27"/>
                 </a:solidFill>
                 <a:latin typeface="Arial"/>
               </a:rPr>
@@ -24601,9 +24601,9 @@
               </a:lnSpc>
             </a:pPr>
             <a:r>
-              <a:rPr sz="1600" b="0" i="0">
-                <a:solidFill>
-                  <a:srgbClr val="6B7484"/>
+              <a:rPr sz="1500" b="0" i="0">
+                <a:solidFill>
+                  <a:srgbClr val="181D27"/>
                 </a:solidFill>
                 <a:latin typeface="Arial"/>
               </a:rPr>
@@ -25295,7 +25295,7 @@
               <a:buChar char="—"/>
             </a:pPr>
             <a:r>
-              <a:rPr sz="1600" b="0" i="0">
+              <a:rPr sz="1700" b="0" i="0">
                 <a:solidFill>
                   <a:srgbClr val="181D27"/>
                 </a:solidFill>
@@ -25304,7 +25304,7 @@
               <a:t>Всего </a:t>
             </a:r>
             <a:r>
-              <a:rPr sz="1600" b="1" i="0">
+              <a:rPr sz="1700" b="1" i="0">
                 <a:solidFill>
                   <a:srgbClr val="181D27"/>
                 </a:solidFill>
@@ -25313,7 +25313,7 @@
               <a:t>7 домашних работ</a:t>
             </a:r>
             <a:r>
-              <a:rPr sz="1600" b="0" i="0">
+              <a:rPr sz="1700" b="0" i="0">
                 <a:solidFill>
                   <a:srgbClr val="181D27"/>
                 </a:solidFill>
@@ -25322,7 +25322,7 @@
               <a:t> и </a:t>
             </a:r>
             <a:r>
-              <a:rPr sz="1600" b="1" i="0">
+              <a:rPr sz="1700" b="1" i="0">
                 <a:solidFill>
                   <a:srgbClr val="181D27"/>
                 </a:solidFill>
@@ -25346,7 +25346,7 @@
               <a:buChar char="—"/>
             </a:pPr>
             <a:r>
-              <a:rPr sz="1600" b="0" i="0">
+              <a:rPr sz="1700" b="0" i="0">
                 <a:solidFill>
                   <a:srgbClr val="181D27"/>
                 </a:solidFill>
@@ -25355,7 +25355,7 @@
               <a:t>Базовый полный балл — </a:t>
             </a:r>
             <a:r>
-              <a:rPr sz="1600" b="1" i="0">
+              <a:rPr sz="1700" b="1" i="0">
                 <a:solidFill>
                   <a:srgbClr val="181D27"/>
                 </a:solidFill>
@@ -25364,7 +25364,7 @@
               <a:t>5</a:t>
             </a:r>
             <a:r>
-              <a:rPr sz="1600" b="0" i="0">
+              <a:rPr sz="1700" b="0" i="0">
                 <a:solidFill>
                   <a:srgbClr val="181D27"/>
                 </a:solidFill>
@@ -25373,7 +25373,7 @@
               <a:t>, с бонусными пунктами — до </a:t>
             </a:r>
             <a:r>
-              <a:rPr sz="1600" b="1" i="0">
+              <a:rPr sz="1700" b="1" i="0">
                 <a:solidFill>
                   <a:srgbClr val="181D27"/>
                 </a:solidFill>
@@ -25397,7 +25397,7 @@
               <a:buChar char="—"/>
             </a:pPr>
             <a:r>
-              <a:rPr sz="1600" b="0" i="0">
+              <a:rPr sz="1700" b="0" i="0">
                 <a:solidFill>
                   <a:srgbClr val="181D27"/>
                 </a:solidFill>
@@ -25421,7 +25421,7 @@
               <a:buChar char="—"/>
             </a:pPr>
             <a:r>
-              <a:rPr sz="1600" b="0" i="0">
+              <a:rPr sz="1700" b="0" i="0">
                 <a:solidFill>
                   <a:srgbClr val="181D27"/>
                 </a:solidFill>
@@ -25445,7 +25445,7 @@
               <a:buChar char="—"/>
             </a:pPr>
             <a:r>
-              <a:rPr sz="1600" b="0" i="0">
+              <a:rPr sz="1700" b="0" i="0">
                 <a:solidFill>
                   <a:srgbClr val="181D27"/>
                 </a:solidFill>
@@ -25527,7 +25527,7 @@
               <a:buChar char="—"/>
             </a:pPr>
             <a:r>
-              <a:rPr sz="1600" b="0" i="0">
+              <a:rPr sz="1700" b="0" i="0">
                 <a:solidFill>
                   <a:srgbClr val="181D27"/>
                 </a:solidFill>
@@ -25536,7 +25536,7 @@
               <a:t>Экзамен — </a:t>
             </a:r>
             <a:r>
-              <a:rPr sz="1600" b="1" i="0">
+              <a:rPr sz="1700" b="1" i="0">
                 <a:solidFill>
                   <a:srgbClr val="181D27"/>
                 </a:solidFill>
@@ -25545,7 +25545,7 @@
               <a:t>два вопроса</a:t>
             </a:r>
             <a:r>
-              <a:rPr sz="1600" b="0" i="0">
+              <a:rPr sz="1700" b="0" i="0">
                 <a:solidFill>
                   <a:srgbClr val="181D27"/>
                 </a:solidFill>
@@ -25569,7 +25569,7 @@
               <a:buChar char="—"/>
             </a:pPr>
             <a:r>
-              <a:rPr sz="1600" b="0" i="0">
+              <a:rPr sz="1700" b="0" i="0">
                 <a:solidFill>
                   <a:srgbClr val="181D27"/>
                 </a:solidFill>
@@ -25578,7 +25578,7 @@
               <a:t>Допуск к экзамену — от </a:t>
             </a:r>
             <a:r>
-              <a:rPr sz="1600" b="1" i="0">
+              <a:rPr sz="1700" b="1" i="0">
                 <a:solidFill>
                   <a:srgbClr val="181D27"/>
                 </a:solidFill>
@@ -25602,7 +25602,7 @@
               <a:buChar char="—"/>
             </a:pPr>
             <a:r>
-              <a:rPr sz="1600" b="1" i="0">
+              <a:rPr sz="1700" b="1" i="0">
                 <a:solidFill>
                   <a:srgbClr val="181D27"/>
                 </a:solidFill>
@@ -25611,7 +25611,7 @@
               <a:t>27 баллов и больше</a:t>
             </a:r>
             <a:r>
-              <a:rPr sz="1600" b="0" i="0">
+              <a:rPr sz="1700" b="0" i="0">
                 <a:solidFill>
                   <a:srgbClr val="181D27"/>
                 </a:solidFill>
@@ -25635,7 +25635,7 @@
               <a:buChar char="—"/>
             </a:pPr>
             <a:r>
-              <a:rPr sz="1600" b="1" i="0">
+              <a:rPr sz="1700" b="1" i="0">
                 <a:solidFill>
                   <a:srgbClr val="181D27"/>
                 </a:solidFill>
@@ -25644,7 +25644,7 @@
               <a:t>32 балла и больше</a:t>
             </a:r>
             <a:r>
-              <a:rPr sz="1600" b="0" i="0">
+              <a:rPr sz="1700" b="0" i="0">
                 <a:solidFill>
                   <a:srgbClr val="181D27"/>
                 </a:solidFill>
@@ -25883,7 +25883,7 @@
               <a:buChar char="—"/>
             </a:pPr>
             <a:r>
-              <a:rPr sz="1600" b="0" i="0">
+              <a:rPr sz="1700" b="0" i="0">
                 <a:solidFill>
                   <a:srgbClr val="181D27"/>
                 </a:solidFill>
@@ -25907,7 +25907,7 @@
               <a:buChar char="—"/>
             </a:pPr>
             <a:r>
-              <a:rPr sz="1600" b="0" i="0">
+              <a:rPr sz="1700" b="0" i="0">
                 <a:solidFill>
                   <a:srgbClr val="181D27"/>
                 </a:solidFill>
@@ -25931,7 +25931,7 @@
               <a:buChar char="—"/>
             </a:pPr>
             <a:r>
-              <a:rPr sz="1600" b="0" i="0">
+              <a:rPr sz="1700" b="0" i="0">
                 <a:solidFill>
                   <a:srgbClr val="181D27"/>
                 </a:solidFill>
@@ -26013,7 +26013,7 @@
               <a:buChar char="—"/>
             </a:pPr>
             <a:r>
-              <a:rPr sz="1600" b="0" i="0">
+              <a:rPr sz="1700" b="0" i="0">
                 <a:solidFill>
                   <a:srgbClr val="181D27"/>
                 </a:solidFill>
@@ -26037,7 +26037,7 @@
               <a:buChar char="—"/>
             </a:pPr>
             <a:r>
-              <a:rPr sz="1600" b="0" i="0">
+              <a:rPr sz="1700" b="0" i="0">
                 <a:solidFill>
                   <a:srgbClr val="181D27"/>
                 </a:solidFill>
@@ -26061,7 +26061,7 @@
               <a:buChar char="—"/>
             </a:pPr>
             <a:r>
-              <a:rPr sz="1600" b="0" i="0">
+              <a:rPr sz="1700" b="0" i="0">
                 <a:solidFill>
                   <a:srgbClr val="181D27"/>
                 </a:solidFill>
@@ -26085,7 +26085,7 @@
               <a:buChar char="—"/>
             </a:pPr>
             <a:r>
-              <a:rPr sz="1600" b="0" i="0">
+              <a:rPr sz="1700" b="0" i="0">
                 <a:solidFill>
                   <a:srgbClr val="181D27"/>
                 </a:solidFill>
@@ -26283,7 +26283,7 @@
             <a:r>
               <a:rPr sz="2000" b="0" i="0">
                 <a:solidFill>
-                  <a:srgbClr val="6B7484"/>
+                  <a:srgbClr val="181D27"/>
                 </a:solidFill>
                 <a:latin typeface="Arial"/>
               </a:rPr>
@@ -26347,7 +26347,7 @@
               </a:spcAft>
             </a:pPr>
             <a:r>
-              <a:rPr sz="1600" b="1" i="0">
+              <a:rPr sz="1700" b="1" i="0">
                 <a:solidFill>
                   <a:srgbClr val="181D27"/>
                 </a:solidFill>
@@ -26366,7 +26366,7 @@
               </a:spcAft>
             </a:pPr>
             <a:r>
-              <a:rPr sz="1600" b="0" i="0">
+              <a:rPr sz="1700" b="0" i="0">
                 <a:solidFill>
                   <a:srgbClr val="181D27"/>
                 </a:solidFill>
@@ -26385,7 +26385,7 @@
               </a:spcAft>
             </a:pPr>
             <a:r>
-              <a:rPr sz="1600" b="0" i="0">
+              <a:rPr sz="1700" b="0" i="0">
                 <a:solidFill>
                   <a:srgbClr val="181D27"/>
                 </a:solidFill>
@@ -26430,7 +26430,7 @@
               </a:spcAft>
             </a:pPr>
             <a:r>
-              <a:rPr sz="1600" b="1" i="0">
+              <a:rPr sz="1700" b="1" i="0">
                 <a:solidFill>
                   <a:srgbClr val="2B5CE6"/>
                 </a:solidFill>
@@ -26491,7 +26491,7 @@
               </a:spcAft>
             </a:pPr>
             <a:r>
-              <a:rPr sz="1600" b="1" i="0">
+              <a:rPr sz="1700" b="1" i="0">
                 <a:solidFill>
                   <a:srgbClr val="2B5CE6"/>
                 </a:solidFill>
@@ -26552,7 +26552,7 @@
               </a:spcAft>
             </a:pPr>
             <a:r>
-              <a:rPr sz="1600" b="1" i="0">
+              <a:rPr sz="1700" b="1" i="0">
                 <a:solidFill>
                   <a:srgbClr val="2B5CE6"/>
                 </a:solidFill>
@@ -26613,7 +26613,7 @@
               </a:spcAft>
             </a:pPr>
             <a:r>
-              <a:rPr sz="1600" b="1" i="0">
+              <a:rPr sz="1700" b="1" i="0">
                 <a:solidFill>
                   <a:srgbClr val="2B5CE6"/>
                 </a:solidFill>
@@ -26674,7 +26674,7 @@
               </a:spcAft>
             </a:pPr>
             <a:r>
-              <a:rPr sz="1600" b="1" i="0">
+              <a:rPr sz="1700" b="1" i="0">
                 <a:solidFill>
                   <a:srgbClr val="2B5CE6"/>
                 </a:solidFill>
@@ -26735,7 +26735,7 @@
               </a:spcAft>
             </a:pPr>
             <a:r>
-              <a:rPr sz="1600" b="1" i="0">
+              <a:rPr sz="1700" b="1" i="0">
                 <a:solidFill>
                   <a:srgbClr val="2B5CE6"/>
                 </a:solidFill>
@@ -26796,7 +26796,7 @@
               </a:spcAft>
             </a:pPr>
             <a:r>
-              <a:rPr sz="1600" b="1" i="0">
+              <a:rPr sz="1700" b="1" i="0">
                 <a:solidFill>
                   <a:srgbClr val="2B5CE6"/>
                 </a:solidFill>
@@ -26857,7 +26857,7 @@
               </a:spcAft>
             </a:pPr>
             <a:r>
-              <a:rPr sz="1600" b="1" i="0">
+              <a:rPr sz="1700" b="1" i="0">
                 <a:solidFill>
                   <a:srgbClr val="2B5CE6"/>
                 </a:solidFill>
@@ -27076,7 +27076,7 @@
             <a:r>
               <a:rPr sz="1800" b="0" i="0">
                 <a:solidFill>
-                  <a:srgbClr val="6B7484"/>
+                  <a:srgbClr val="181D27"/>
                 </a:solidFill>
                 <a:latin typeface="Arial"/>
               </a:rPr>
